--- a/reports/14-okr-scorecard.pptx
+++ b/reports/14-okr-scorecard.pptx
@@ -107,7 +107,7 @@
   <p:extLst>
     <p:ext uri="{521415D9-36F7-43E2-AB2F-B90AF26B5E84}">
       <p14:sectionLst xmlns:p14="http://schemas.microsoft.com/office/powerpoint/2010/main">
-        <p14:section name="OKR scorecard" id="{cc85ab5b-3fb9-c805-f0fd-2d0c432efc13}">
+        <p14:section name="OKR scorecard" id="{bd7d50c8-6ba5-bff5-6edc-52af87399f55}">
           <p14:sldIdLst>
             <p14:sldId id="256"/>
           </p14:sldIdLst>
